--- a/ppt/ATRI-答辩PPT-v4.pptx
+++ b/ppt/ATRI-答辩PPT-v4.pptx
@@ -3354,7 +3354,7 @@
                 <a:ea typeface="Source Han Sans SC"/>
                 <a:cs typeface="Source Han Sans SC"/>
               </a:rPr>
-              <a:t>一台能自己看、自己想、自己走的桌面双足机器人</a:t>
+              <a:t>22 自由度桌面双足机器人与全离线任务栈</a:t>
             </a:r>
           </a:p>
         </p:txBody>
@@ -4635,7 +4635,7 @@
                 <a:ea typeface="Source Han Sans SC Heavy"/>
                 <a:cs typeface="Source Han Sans SC Heavy"/>
               </a:rPr>
-              <a:t>无硬件闭环演示 5/5 任务全通过 · Python 3.14 only</a:t>
+              <a:t>无硬件演示 5/5 赛题全部跑通 · Python 3.14 only</a:t>
             </a:r>
           </a:p>
         </p:txBody>
@@ -4686,7 +4686,7 @@
         </p:nvPicPr>
         <p:blipFill>
           <a:blip r:embed="rId2"/>
-          <a:srcRect l="4743" r="13500"/>
+          <a:srcRect l="4738" r="13486"/>
           <a:stretch>
             <a:fillRect/>
           </a:stretch>
@@ -4781,7 +4781,7 @@
                 <a:ea typeface="Source Han Sans SC"/>
                 <a:cs typeface="Source Han Sans SC"/>
               </a:rPr>
-              <a:t>软件栈已跑通五项赛题闭环；样机在晋级后装配制造。</a:t>
+              <a:t>离线任务栈与仿真测试均已跑通，晋级后推进样机装配。</a:t>
             </a:r>
           </a:p>
         </p:txBody>
@@ -5046,7 +5046,7 @@
                 <a:ea typeface="Source Han Sans SC Heavy"/>
                 <a:cs typeface="Source Han Sans SC Heavy"/>
               </a:rPr>
-              <a:t>离线语音交互：Linux 四级引擎探测，无发声安全 Mock</a:t>
+              <a:t>语音模块支持四级引擎探测，无声卡环境回退至内存模拟</a:t>
             </a:r>
           </a:p>
         </p:txBody>
@@ -5087,7 +5087,7 @@
                 <a:ea typeface="Source Han Sans SC"/>
                 <a:cs typeface="Source Han Sans SC"/>
               </a:rPr>
-              <a:t>覆盖开发机 macOS、部署板 Linux 及无声卡 CI 自动化环境；ATRI_TTS 环境变量可强制。</a:t>
+              <a:t>适配开发机系统、嵌入式 Linux 板以及无外接声卡的自动化测试流水线。</a:t>
             </a:r>
           </a:p>
         </p:txBody>
@@ -6583,7 +6583,7 @@
                 <a:ea typeface="Source Han Sans SC Heavy"/>
                 <a:cs typeface="Source Han Sans SC Heavy"/>
               </a:rPr>
-              <a:t>任务一 人脸识别：头部 2 自由度对准，不声称认出姓名</a:t>
+              <a:t>任务一 人脸识别：头部两轴对准人脸目标框，身份识别仍待后续攻关</a:t>
             </a:r>
           </a:p>
         </p:txBody>
@@ -6624,7 +6624,7 @@
                 <a:ea typeface="Source Han Sans SC"/>
                 <a:cs typeface="Source Han Sans SC"/>
               </a:rPr>
-              <a:t>四步链路里第一步已经跑通，头部双舵机闭环跟准检测框，TTS 播报闭环。</a:t>
+              <a:t>四步处理链路跑通第一步，头部双自由度随动跟踪视野内的人脸位置。</a:t>
             </a:r>
           </a:p>
         </p:txBody>
@@ -8697,7 +8697,7 @@
                 <a:ea typeface="Source Han Sans SC Heavy"/>
                 <a:cs typeface="Source Han Sans SC Heavy"/>
               </a:rPr>
-              <a:t>任务二 二维码循迹：二维码本身就是一段可执行 JSON 指令</a:t>
+              <a:t>任务二 二维码循迹：地面二维码携带 JSON 载荷，动态分发行走与转向动作</a:t>
             </a:r>
           </a:p>
         </p:txBody>
@@ -8738,7 +8738,7 @@
                 <a:ea typeface="Source Han Sans SC"/>
                 <a:cs typeface="Source Han Sans SC"/>
               </a:rPr>
-              <a:t>现场改路径只需更换二维码贴纸，不用重新刷机、不用重新编译代码。</a:t>
+              <a:t>通过更换场地二维码变更动作步骤，无需反复重新烧录固件。</a:t>
             </a:r>
           </a:p>
         </p:txBody>
@@ -10434,7 +10434,7 @@
                 <a:ea typeface="Source Han Sans SC Heavy"/>
                 <a:cs typeface="Source Han Sans SC Heavy"/>
               </a:rPr>
-              <a:t>任务三 物品搬运：夹爪与步数换算已就绪，缺的是一双眼睛</a:t>
+              <a:t>任务三 物品搬运：搬运流程与步数折算已就绪，通用目标识别尚待补充</a:t>
             </a:r>
           </a:p>
         </p:txBody>
@@ -10475,7 +10475,7 @@
                 <a:ea typeface="Source Han Sans SC"/>
                 <a:cs typeface="Source Han Sans SC"/>
               </a:rPr>
-              <a:t>抓取的前提是对齐，搬运技能的状态流转已跑通，当前阶段需补齐目标检测器。</a:t>
+              <a:t>搬运技能的动作状态流转已经打通，当前阶段正补充轻量通用物体检测。</a:t>
             </a:r>
           </a:p>
         </p:txBody>
@@ -12756,7 +12756,7 @@
                 <a:ea typeface="Source Han Sans SC Heavy"/>
                 <a:cs typeface="Source Han Sans SC Heavy"/>
               </a:rPr>
-              <a:t>任务四 体育运动：检测到球后朝向伺服，当前执行单次修正</a:t>
+              <a:t>任务四 体育运动：检测球位并修正偏航角，当前为单次开环对位</a:t>
             </a:r>
           </a:p>
         </p:txBody>
@@ -12797,7 +12797,7 @@
                 <a:ea typeface="Source Han Sans SC"/>
                 <a:cs typeface="Source Han Sans SC"/>
               </a:rPr>
-              <a:t>误差判据已进代码，闭环迭代律已在设计包中跑通，缺的是移植到技能层。</a:t>
+              <a:t>横向偏差死区判据已写入技能，多轮迭代控制律需从设计包移植。</a:t>
             </a:r>
           </a:p>
         </p:txBody>
@@ -14914,7 +14914,7 @@
                 <a:ea typeface="Source Han Sans SC Heavy"/>
                 <a:cs typeface="Source Han Sans SC Heavy"/>
               </a:rPr>
-              <a:t>任务五 娱乐休闲：22 轴舞蹈轨迹能算，音乐文件还需要播放器</a:t>
+              <a:t>任务五 娱乐休闲：22 轴联动生成舞蹈轨迹，音乐播放待接入硬件接口</a:t>
             </a:r>
           </a:p>
         </p:txBody>
@@ -14955,7 +14955,7 @@
                 <a:ea typeface="Source Han Sans SC"/>
                 <a:cs typeface="Source Han Sans SC"/>
               </a:rPr>
-              <a:t>舞蹈不是播放预录视频，而是全机 22 个关节按时间轴实时插补出的连续轨迹。</a:t>
+              <a:t>根据时间轴在线插补全机关节轨迹，动作生成与音频时序待进一步标定。</a:t>
             </a:r>
           </a:p>
         </p:txBody>
@@ -17192,7 +17192,7 @@
                 <a:ea typeface="Source Han Sans SC Heavy"/>
                 <a:cs typeface="Source Han Sans SC Heavy"/>
               </a:rPr>
-              <a:t>Webots 仿真：三层判定守护绑定，零重力不是走路证明</a:t>
+              <a:t>40 项仿真测试核验控制器绑定，零重力联调不代指地面行走</a:t>
             </a:r>
           </a:p>
         </p:txBody>
@@ -17233,7 +17233,7 @@
                 <a:ea typeface="Source Han Sans SC"/>
                 <a:cs typeface="Source Han Sans SC"/>
               </a:rPr>
-              <a:t>离线 40 项控制器测试全过；映射截断或零速度必须报错，保持仿真口径诚实。</a:t>
+              <a:t>仿真测试用于验证控制器映射完整性与关节运动范围，明确区分运动学与动力学边界。</a:t>
             </a:r>
           </a:p>
         </p:txBody>
@@ -17883,7 +17883,7 @@
                 <a:ea typeface="Source Han Sans SC Heavy"/>
                 <a:cs typeface="Source Han Sans SC Heavy"/>
               </a:rPr>
-              <a:t>仿真真实边界说明（正面回答评委质疑）：</a:t>
+              <a:t>仿真测试边界说明：</a:t>
             </a:r>
           </a:p>
           <a:p>
@@ -18039,7 +18039,7 @@
                 <a:ea typeface="Source Han Sans SC"/>
                 <a:cs typeface="Source Han Sans SC"/>
               </a:rPr>
-              <a:t>仿真控制器与大脑小脑架构完全打通，动力学双足实机闭环列为阶段三攻关任务。</a:t>
+              <a:t>仿真控制器与大脑小脑架构完全打通，动力学双足实机闭环列为后续样机攻关任务。</a:t>
             </a:r>
           </a:p>
         </p:txBody>
@@ -18433,7 +18433,7 @@
                 <a:ea typeface="Source Han Sans SC Heavy"/>
                 <a:cs typeface="Source Han Sans SC Heavy"/>
               </a:rPr>
-              <a:t>髋肩错轴抽出 30–35 mm，彻底消除 19.6 mm 轴距干涉</a:t>
+              <a:t>髋肩舵机沿轴向抽出 30–35 mm，避开 19.6 mm 紧凑轴距干涉</a:t>
             </a:r>
           </a:p>
         </p:txBody>
@@ -18474,7 +18474,7 @@
                 <a:ea typeface="Source Han Sans SC"/>
                 <a:cs typeface="Source Han Sans SC"/>
               </a:rPr>
-              <a:t>19.6 mm 轴距塞不下两只 35 mm 舵机；转动轴心不变，机体沿自身法向抽出。</a:t>
+              <a:t>在紧凑空间内调整结构布局以满足实际装配要求，旋转中心保持原位。</a:t>
             </a:r>
           </a:p>
         </p:txBody>
@@ -18595,7 +18595,7 @@
                 <a:ea typeface="Source Han Sans SC Heavy"/>
                 <a:cs typeface="Source Han Sans SC Heavy"/>
               </a:rPr>
-              <a:t>干涉物理成因与错轴拓扑</a:t>
+              <a:t>装配干涉成因与错轴方案</a:t>
             </a:r>
           </a:p>
         </p:txBody>
@@ -18714,7 +18714,7 @@
                 <a:ea typeface="Source Han Sans SC Heavy"/>
                 <a:cs typeface="Source Han Sans SC Heavy"/>
               </a:rPr>
-              <a:t>物理碰撞死锁：</a:t>
+              <a:t>装配干涉成因：</a:t>
             </a:r>
           </a:p>
           <a:p>
@@ -18933,7 +18933,7 @@
                 <a:ea typeface="Source Han Sans SC Heavy"/>
                 <a:cs typeface="Source Han Sans SC Heavy"/>
               </a:rPr>
-              <a:t>严正口径纠偏（禁止混淆）：</a:t>
+              <a:t>图纸尺寸口径说明：</a:t>
             </a:r>
           </a:p>
           <a:p>
@@ -19482,7 +19482,7 @@
                 <a:ea typeface="Source Han Sans SC Heavy"/>
                 <a:cs typeface="Source Han Sans SC Heavy"/>
               </a:rPr>
-              <a:t>两套质量数据各有依据，CAD 减重显著但尚未回灌 URDF</a:t>
+              <a:t>两套质量数据分别建档，CAD 轻量化后待统一回灌</a:t>
             </a:r>
           </a:p>
         </p:txBody>
@@ -19523,7 +19523,7 @@
                 <a:ea typeface="Source Han Sans SC"/>
                 <a:cs typeface="Source Han Sans SC"/>
               </a:rPr>
-              <a:t>CAD 优化后结构轻量化至 1404 g，但交接包与测试基线仍锁定 URDF 1790 g，仿真按原口径。</a:t>
+              <a:t>申报基准与现行设计版本双轨记录，结构优化减重约 386 g。</a:t>
             </a:r>
           </a:p>
         </p:txBody>
@@ -20803,7 +20803,7 @@
                 <a:ea typeface="Source Han Sans SC"/>
                 <a:cs typeface="Source Han Sans SC"/>
               </a:rPr>
-              <a:t>幻灯片严禁混用两套质量，URDF 是过去的基线，CAD 是当前的物理演进，两者皆为客观事实。</a:t>
+              <a:t>URDF 为前期申报基线，CAD 为现行优化数据，两者客观并存，定型后统一回灌。</a:t>
             </a:r>
           </a:p>
         </p:txBody>
@@ -21197,7 +21197,7 @@
                 <a:ea typeface="Source Han Sans SC Heavy"/>
                 <a:cs typeface="Source Han Sans SC Heavy"/>
               </a:rPr>
-              <a:t>动力学扭矩主判据：连续额定 0.98 N·m，直面踝部腰部过载</a:t>
+              <a:t>校核依据取 0.98 N·m 连续额定，明确踝部与腰部过载区间</a:t>
             </a:r>
           </a:p>
         </p:txBody>
@@ -21238,7 +21238,7 @@
                 <a:ea typeface="Source Han Sans SC"/>
                 <a:cs typeface="Source Han Sans SC"/>
               </a:rPr>
-              <a:t>严禁用 1.47 N·m 瞬态峰值粉饰过载；踝关节与腰关节需专项减重与连杆辅助。</a:t>
+              <a:t>使用长期工作扭矩评估连续作业表现，针对过载关节制定机械与算法应对方案。</a:t>
             </a:r>
           </a:p>
         </p:txBody>
@@ -21449,7 +21449,7 @@
                 <a:ea typeface="Source Han Sans SC Heavy"/>
                 <a:cs typeface="Source Han Sans SC Heavy"/>
               </a:rPr>
-              <a:t>主判据准则：连续额定 0.98 N·m</a:t>
+              <a:t>核算依据：连续额定 0.98 N·m</a:t>
             </a:r>
           </a:p>
         </p:txBody>
@@ -21527,7 +21527,7 @@
                 <a:cs typeface="Source Han Sans SC"/>
               </a:rPr>
               <a:t>【判据澄清】选型 STS3215，其连续额定扭矩为 0.98 N·m（来自 12V 规格标称）。
-【拒绝粉饰】峰值 1.47 N·m 仅为堵转极限，用于长时间双足站立与行走极易导致电机过热烧毁。CAD 标注的「102%」因采用峰值计算，已被本轮审计废止。</a:t>
+【判据说明】峰值 1.47 N·m 仅为堵转极限，用于长时间双足站立与行走极易导致电机过热烧毁。CAD 标注的「102%」因采用峰值计算，已被本轮审计废止。</a:t>
             </a:r>
           </a:p>
         </p:txBody>
@@ -22176,7 +22176,7 @@
                 <a:ea typeface="Source Han Sans SC"/>
                 <a:cs typeface="Source Han Sans SC"/>
               </a:rPr>
-              <a:t>把过载坦率写在幻灯片上，代表团队懂真实的机器人动力学，而不是掩耳盗铃。</a:t>
+              <a:t>以连续额定扭矩为真实基准开展校核，为结构轻量化与机构辅助提供明确依据。</a:t>
             </a:r>
           </a:p>
         </p:txBody>
@@ -22570,7 +22570,7 @@
                 <a:ea typeface="Source Han Sans SC Heavy"/>
                 <a:cs typeface="Source Han Sans SC Heavy"/>
               </a:rPr>
-              <a:t>五项赛题共用一套任务系统，软件栈已经跑通</a:t>
+              <a:t>一套架构串联五项赛题，核心软件跑通脱机闭环</a:t>
             </a:r>
           </a:p>
         </p:txBody>
@@ -22611,7 +22611,7 @@
                 <a:ea typeface="Source Han Sans SC"/>
                 <a:cs typeface="Source Han Sans SC"/>
               </a:rPr>
-              <a:t>左边是要解决的痛点，中间是已经做出来的指标，右边是当前推进到哪一步。</a:t>
+              <a:t>对照教学与赛场的实际问题、当前交付数据及后续推进节点。</a:t>
             </a:r>
           </a:p>
         </p:txBody>
@@ -23634,7 +23634,7 @@
                 <a:ea typeface="Source Han Sans SC Heavy"/>
                 <a:cs typeface="Source Han Sans SC Heavy"/>
               </a:rPr>
-              <a:t> 闭环</a:t>
+              <a:t> 项全通</a:t>
             </a:r>
           </a:p>
         </p:txBody>
@@ -23675,7 +23675,7 @@
                 <a:ea typeface="Source Han Sans SC"/>
                 <a:cs typeface="Source Han Sans SC"/>
               </a:rPr>
-              <a:t>五项赛题无硬件闭环演示全部通过，可当场命令行秒级复现</a:t>
+              <a:t>五项赛题在无硬件条件下跑通状态流转，控制台命令可秒级复现</a:t>
             </a:r>
           </a:p>
         </p:txBody>
@@ -24100,7 +24100,7 @@
                 <a:ea typeface="Source Han Sans SC Heavy"/>
                 <a:cs typeface="Source Han Sans SC Heavy"/>
               </a:rPr>
-              <a:t>软件栈 + 任务闭环</a:t>
+              <a:t>软件栈与任务状态机</a:t>
             </a:r>
           </a:p>
         </p:txBody>
@@ -25147,7 +25147,7 @@
                 <a:ea typeface="Source Han Sans SC Heavy"/>
                 <a:cs typeface="Source Han Sans SC Heavy"/>
               </a:rPr>
-              <a:t>2000 mAh 支撑约 13 分钟，赛题 30 分钟需标称 ≥4.53 Ah</a:t>
+              <a:t>2000 mAh 电池续航约 13 分钟，连续作业 30 分钟需配置 ≥4.53 Ah</a:t>
             </a:r>
           </a:p>
         </p:txBody>
@@ -25188,7 +25188,7 @@
                 <a:ea typeface="Source Han Sans SC"/>
                 <a:cs typeface="Source Han Sans SC"/>
               </a:rPr>
-              <a:t>现选电池不满足赛题续航要求；补足电池会加重机体，扭矩与功耗面临系统级挑战。</a:t>
+              <a:t>根据全机电流测算实际工作时间，评估大容量电池对机体配重的影响。</a:t>
             </a:r>
           </a:p>
         </p:txBody>
@@ -25806,7 +25806,7 @@
                 <a:ea typeface="Source Han Sans SC"/>
                 <a:cs typeface="Source Han Sans SC"/>
               </a:rPr>
-              <a:t>现选 2000 mAh 电池无法支撑 30 分钟连续作业，我们不隐瞒续航短板，明确将高比能电池选型列为实装攻关项。</a:t>
+              <a:t>现有 2000 mAh 电池在重载下约支撑 13 分钟，高容量电池选型已列入实机装配攻关任务。</a:t>
             </a:r>
           </a:p>
         </p:txBody>
@@ -26200,7 +26200,7 @@
                 <a:ea typeface="Source Han Sans SC Heavy"/>
                 <a:cs typeface="Source Han Sans SC Heavy"/>
               </a:rPr>
-              <a:t>物料清单与预算：全口径与新增采购明晰区分</a:t>
+              <a:t>全口径成本与新增采购分类核算，物料清单条目清晰</a:t>
             </a:r>
           </a:p>
         </p:txBody>
@@ -26241,7 +26241,7 @@
                 <a:ea typeface="Source Han Sans SC"/>
                 <a:cs typeface="Source Han Sans SC"/>
               </a:rPr>
-              <a:t>树莓派 4B 为 BOM 参考板，软件面向通用 Linux 编写；两套口径清清楚楚。</a:t>
+              <a:t>树莓派 4B 作为参考计算平台，软件面向通用 Linux 编写，扣减已有设备后降低采购开销。</a:t>
             </a:r>
           </a:p>
         </p:txBody>
@@ -28879,7 +28879,7 @@
                 <a:ea typeface="Source Han Sans SC"/>
                 <a:cs typeface="Source Han Sans SC"/>
               </a:rPr>
-              <a:t>本清单为实测预算设计，尚未正式下单采购；价格随市场浮动，坚决不编造虚假已采购发票。</a:t>
+              <a:t>本清单为阶段设计预算，价格随采购批次微调，样机生产时按实际发票入账。</a:t>
             </a:r>
           </a:p>
         </p:txBody>
@@ -29273,7 +29273,7 @@
                 <a:ea typeface="Source Han Sans SC Heavy"/>
                 <a:cs typeface="Source Han Sans SC Heavy"/>
               </a:rPr>
-              <a:t>工程质量基线：现场可跑的四条命令与测试证据</a:t>
+              <a:t>自动化测试与任务演示，四条控制台命令现场复现</a:t>
             </a:r>
           </a:p>
         </p:txBody>
@@ -29314,7 +29314,7 @@
                 <a:ea typeface="Source Han Sans SC"/>
                 <a:cs typeface="Source Han Sans SC"/>
               </a:rPr>
-              <a:t>本机 Ubuntu Linux Python 3.14.7 环境已跑通；纯控制台确定性复现，拒绝伪造输出。</a:t>
+              <a:t>在 Python 3.14 环境下完成验证，控制台直接输出结果。</a:t>
             </a:r>
           </a:p>
         </p:txBody>
@@ -30283,7 +30283,7 @@
                 <a:ea typeface="Source Han Sans SC Heavy"/>
                 <a:cs typeface="Source Han Sans SC Heavy"/>
               </a:rPr>
-              <a:t>实事求是声明：</a:t>
+              <a:t>运行说明：</a:t>
             </a:r>
             <a:r>
               <a:rPr sz="900" b="0" i="0">
@@ -30294,7 +30294,7 @@
                 <a:ea typeface="Source Han Sans SC"/>
                 <a:cs typeface="Source Han Sans SC"/>
               </a:rPr>
-              <a:t>本机环境 Python 3.14 验证通过；CadQuery 与带 GUI 的真实 Webots 3D 窗口未在本机跑，不作虚假宣称。</a:t>
+              <a:t>本机环境 Python 3.14 验证通过；CadQuery 几何与带 GUI 的 Webots 窗口未在演示中调用。</a:t>
             </a:r>
           </a:p>
         </p:txBody>
@@ -30688,7 +30688,7 @@
                 <a:ea typeface="Source Han Sans SC Heavy"/>
                 <a:cs typeface="Source Han Sans SC Heavy"/>
               </a:rPr>
-              <a:t>还没做的，写在这里：实事求是的攻坚路线图</a:t>
+              <a:t>后续工程攻关清单与阶段推进计划</a:t>
             </a:r>
           </a:p>
         </p:txBody>
@@ -30729,7 +30729,7 @@
                 <a:ea typeface="Source Han Sans SC"/>
                 <a:cs typeface="Source Han Sans SC"/>
               </a:rPr>
-              <a:t>减重回灌、12V 扭矩实测、真实串口总线驱动与大容量电池；不把规划包装成已完成。</a:t>
+              <a:t>梳理目前仍未完成的技术环节，明确样机制造与实机标定步骤。</a:t>
             </a:r>
           </a:p>
         </p:txBody>
@@ -30802,7 +30802,7 @@
                 <a:ea typeface="Source Han Sans SC Heavy"/>
                 <a:cs typeface="Source Han Sans SC Heavy"/>
               </a:rPr>
-              <a:t>4 大攻关项</a:t>
+              <a:t>4 项攻关任务</a:t>
             </a:r>
             <a:r>
               <a:rPr sz="1100" b="0" i="0">
@@ -30813,7 +30813,7 @@
                 <a:ea typeface="Source Han Sans SC Heavy"/>
                 <a:cs typeface="Source Han Sans SC Heavy"/>
               </a:rPr>
-              <a:t> · 绝不隐瞒工程差距</a:t>
+              <a:t> · 阶段推进步骤</a:t>
             </a:r>
           </a:p>
         </p:txBody>
@@ -31714,7 +31714,7 @@
                 <a:ea typeface="Source Han Sans SC Heavy"/>
                 <a:cs typeface="Source Han Sans SC Heavy"/>
               </a:rPr>
-              <a:t>态度宣言：</a:t>
+              <a:t>推进原则：</a:t>
             </a:r>
             <a:r>
               <a:rPr sz="900" b="0" i="0">
@@ -31725,7 +31725,7 @@
                 <a:ea typeface="Source Han Sans SC"/>
                 <a:cs typeface="Source Han Sans SC"/>
               </a:rPr>
-              <a:t>实事求是是科技创新的第一准则。我们清楚地知道距离一台完美真机还有多远，并且已经规划好了每一步。</a:t>
+              <a:t>明确当前软硬件的技术断点与工作计划，晋级后按清单推进真机联调。</a:t>
             </a:r>
           </a:p>
         </p:txBody>
@@ -31968,7 +31968,7 @@
                 <a:ea typeface="Source Han Sans SC Heavy"/>
                 <a:cs typeface="Source Han Sans SC Heavy"/>
               </a:rPr>
-              <a:t>扎实地基构筑自主智能，随时迎接真机制造</a:t>
+              <a:t>完成离线软件栈验证，推进物理样机制造</a:t>
             </a:r>
           </a:p>
         </p:txBody>
@@ -33185,7 +33185,7 @@
                 <a:ea typeface="Source Han Sans SC Heavy"/>
                 <a:cs typeface="Source Han Sans SC Heavy"/>
               </a:rPr>
-              <a:t>恳请各位专家评委批评指正！</a:t>
+              <a:t>感谢各位评委老师，请批评指正！</a:t>
             </a:r>
           </a:p>
         </p:txBody>
@@ -33450,7 +33450,7 @@
                 <a:ea typeface="Source Han Sans SC Heavy"/>
                 <a:cs typeface="Source Han Sans SC Heavy"/>
               </a:rPr>
-              <a:t>设备贵、算法散、断网瘫：双足进课堂的三道高墙</a:t>
+              <a:t>硬件昂贵、算法离散、断网停摆：双足机器人的教学痛点</a:t>
             </a:r>
           </a:p>
         </p:txBody>
@@ -33491,7 +33491,7 @@
                 <a:ea typeface="Source Han Sans SC"/>
                 <a:cs typeface="Source Han Sans SC"/>
               </a:rPr>
-              <a:t>想开一门具身智能实验课，第一道坎不是教学法，而是硬件预算与工程架构。</a:t>
+              <a:t>高校开设具身智能实验课，阻力常在设备采购开销、脚本碎片化和对公网的依赖。</a:t>
             </a:r>
           </a:p>
         </p:txBody>
@@ -33732,7 +33732,7 @@
                 <a:cs typeface="Source Han Sans SC"/>
               </a:rPr>
               <a:t>现状代价：商业教育双足套件单台 6000–12000 元，采购 20 台需 12–24 万元，高校实验室多只能买 1–2 台作观摩展示，学生无法人手一机独立调试。
-A.T.R.I. 方案：新增采购压到 ¥2725–3260 元，全班 20 台仅约 5.5 万元，打破从「只能演示」到「成班开课」的成本鸿沟。</a:t>
+A.T.R.I. 方案：新增采购压到 ¥2725–3260 元，全班 20 台仅约 5.5 万元，让成班人手一机独立调试成为可能。</a:t>
             </a:r>
           </a:p>
         </p:txBody>
@@ -33937,7 +33937,7 @@
                 <a:cs typeface="Source Han Sans SC"/>
               </a:rPr>
               <a:t>现状代价：人脸、循迹、抓取各写一套 main()，相机初始化与状态管理互不相通。学生学到的是一次性孤立脚本，无法掌握系统级任务调度设计。
-A.T.R.I. 方案：统一任务卡 JSON + 有限状态机 FSM + 插件式技能库。换赛题只需换配置，一套底座支撑五项赛题闭环。</a:t>
+A.T.R.I. 方案：统一任务卡 JSON + 有限状态机 FSM + 插件式技能库。换赛题只需替换配置，一套底座支持五项任务调度。</a:t>
             </a:r>
           </a:p>
         </p:txBody>
@@ -34628,7 +34628,7 @@
                 <a:ea typeface="Source Han Sans SC Heavy"/>
                 <a:cs typeface="Source Han Sans SC Heavy"/>
               </a:rPr>
-              <a:t>418 mm 整机紧凑包络，22 自由度完整覆盖赛题检录</a:t>
+              <a:t>418 mm 整机尺寸合规，22 自由度覆盖赛题检录项</a:t>
             </a:r>
           </a:p>
         </p:txBody>
@@ -34669,7 +34669,7 @@
                 <a:ea typeface="Source Han Sans SC"/>
                 <a:cs typeface="Source Han Sans SC"/>
               </a:rPr>
-              <a:t>高度与体宽远低于 600×300×300 mm 上限，自由度逐项对应双足与双臂作业需求。</a:t>
+              <a:t>机身高度与体宽保留明确裕量，自由度逐项对应双足行走与上肢作业要求。</a:t>
             </a:r>
           </a:p>
         </p:txBody>
@@ -37001,7 +37001,7 @@
                 <a:ea typeface="Source Han Sans SC Heavy"/>
                 <a:cs typeface="Source Han Sans SC Heavy"/>
               </a:rPr>
-              <a:t>分层架构：大脑做决策，小脑算轨迹，边界清晰解耦</a:t>
+              <a:t>决策、运动与执行分层解耦，接口契约边界清晰</a:t>
             </a:r>
           </a:p>
         </p:txBody>
@@ -37042,7 +37042,7 @@
                 <a:ea typeface="Source Han Sans SC"/>
                 <a:cs typeface="Source Han Sans SC"/>
               </a:rPr>
-              <a:t>大脑基于通用 Linux 板，小脑现行 Python 实现；STM32 下沉与真机串口为规划接口。</a:t>
+              <a:t>上层不处理底层舵机协议，底层不解析任务语义，全栈基于通用 Python 接口构建。</a:t>
             </a:r>
           </a:p>
         </p:txBody>
@@ -40829,7 +40829,7 @@
                 <a:ea typeface="Source Han Sans SC Heavy"/>
                 <a:cs typeface="Source Han Sans SC Heavy"/>
               </a:rPr>
-              <a:t>任务有限状态机：6 状态严密流转，JSON 描述赛题</a:t>
+              <a:t>五项赛题对应五张 JSON 任务卡，6 状态 FSM 管理流程</a:t>
             </a:r>
           </a:p>
         </p:txBody>
@@ -40870,7 +40870,7 @@
                 <a:ea typeface="Source Han Sans SC"/>
                 <a:cs typeface="Source Han Sans SC"/>
               </a:rPr>
-              <a:t>任务变成数据，调度交给引擎；非法状态跳变立即抛出 FSMError。</a:t>
+              <a:t>业务参数与执行代码解耦，状态转移具备确定性与可追溯性，异常自动退出。</a:t>
             </a:r>
           </a:p>
         </p:txBody>
@@ -42171,7 +42171,7 @@
                 <a:ea typeface="Source Han Sans SC Heavy"/>
                 <a:cs typeface="Source Han Sans SC Heavy"/>
               </a:rPr>
-              <a:t>状态机设计核心机制</a:t>
+              <a:t>状态机运行机制</a:t>
             </a:r>
           </a:p>
           <a:p>
@@ -42720,7 +42720,7 @@
                 <a:ea typeface="Source Han Sans SC Heavy"/>
                 <a:cs typeface="Source Han Sans SC Heavy"/>
               </a:rPr>
-              <a:t>技能契约：根除假成功，found 严守布尔，超时只举旗</a:t>
+              <a:t>技能契约校验返回值类型，感知失败立即阻断动作</a:t>
             </a:r>
           </a:p>
         </p:txBody>
@@ -42761,7 +42761,7 @@
                 <a:ea typeface="Source Han Sans SC"/>
                 <a:cs typeface="Source Han Sans SC"/>
               </a:rPr>
-              <a:t>评委问「目标没找到还会不会往下做动作」——绝不会，感知失败立即阻断下发。</a:t>
+              <a:t>排查并修复早期测试中的逻辑隐患，通过 344 项主包测试锁定边界异常。</a:t>
             </a:r>
           </a:p>
         </p:txBody>
@@ -42845,7 +42845,7 @@
                 <a:ea typeface="Source Han Sans SC Heavy"/>
                 <a:cs typeface="Source Han Sans SC Heavy"/>
               </a:rPr>
-              <a:t> · 严守三大契约防御</a:t>
+              <a:t> · 统一接口契约保护</a:t>
             </a:r>
           </a:p>
         </p:txBody>
@@ -42972,7 +42972,7 @@
                 <a:ea typeface="Source Han Sans SC Heavy"/>
                 <a:cs typeface="Source Han Sans SC Heavy"/>
               </a:rPr>
-              <a:t>契约一 · 彻底消除假阳性成功</a:t>
+              <a:t>契约一 · 校验感知返回值类型</a:t>
             </a:r>
           </a:p>
         </p:txBody>
@@ -43555,7 +43555,7 @@
                 <a:ea typeface="Source Han Sans SC"/>
                 <a:cs typeface="Source Han Sans SC"/>
               </a:rPr>
-              <a:t>绝不靠「无论如何都返回成功」来刷演示通过率，真实成败是自动化任务系统的底线。</a:t>
+              <a:t>目标没检测到就立即中断退出，避免盲目动作引发机械碰撞。</a:t>
             </a:r>
           </a:p>
         </p:txBody>
@@ -43949,7 +43949,7 @@
                 <a:ea typeface="Source Han Sans SC Heavy"/>
                 <a:cs typeface="Source Han Sans SC Heavy"/>
               </a:rPr>
-              <a:t>小脑运动内核：正弦步态现算，动作库解耦，拒绝非有限值</a:t>
+              <a:t>正弦步态在线计算，动作库支持 JSON 配置，下发前过滤非有限值</a:t>
             </a:r>
           </a:p>
         </p:txBody>
@@ -43990,7 +43990,7 @@
                 <a:ea typeface="Source Han Sans SC"/>
                 <a:cs typeface="Source Han Sans SC"/>
               </a:rPr>
-              <a:t>限位在 set_angle 统一硬件钳制；NaN / Inf 坚决拒绝，不会被静默钳成限位尽头。</a:t>
+              <a:t>小脑层统一处理步态轨迹插补与关键帧回放，并在关节指令下发前实施硬限位。</a:t>
             </a:r>
           </a:p>
         </p:txBody>
@@ -45197,7 +45197,7 @@
                 <a:ea typeface="Source Han Sans SC Heavy"/>
                 <a:cs typeface="Source Han Sans SC Heavy"/>
               </a:rPr>
-              <a:t>单目视觉本地运行：能检出框，特征比对未做</a:t>
+              <a:t>单目视觉输出定位坐标框，人脸身份比对尚未接入</a:t>
             </a:r>
           </a:p>
         </p:txBody>
@@ -45238,7 +45238,7 @@
                 <a:ea typeface="Source Han Sans SC"/>
                 <a:cs typeface="Source Han Sans SC"/>
               </a:rPr>
-              <a:t>Q&amp;A 坦诚承认身份库未接；幻灯片坚决不吹成「认出是谁」。</a:t>
+              <a:t>上层使用统一定义的感知返回结构，底层支持检测与模拟桩切换；明确当前已实现与未实现的边界。</a:t>
             </a:r>
           </a:p>
         </p:txBody>
@@ -46518,7 +46518,7 @@
                 <a:ea typeface="Source Han Sans SC Heavy"/>
                 <a:cs typeface="Source Han Sans SC Heavy"/>
               </a:rPr>
-              <a:t>答辩核心诚信自律守则（评委重点核查项）：</a:t>
+              <a:t>当前工程实现边界（明确说明）：</a:t>
             </a:r>
           </a:p>
           <a:p>
@@ -46550,7 +46550,7 @@
                 <a:ea typeface="Source Han Sans SC"/>
                 <a:cs typeface="Source Han Sans SC"/>
               </a:rPr>
-              <a:t>OpenCV detect_face 只能输出人脸所在位置。FaceSkill 在取不到身份时回落至默认名，置信度写死 0.93。绝不宣称实现了真实人脸身份识别。</a:t>
+              <a:t>OpenCV detect_face 只能输出人脸所在位置。FaceSkill 在取不到身份时回落至默认名，置信度写死 0.93。目前返回检测框坐标，未接入身份特征向量提取。</a:t>
             </a:r>
           </a:p>
           <a:p>
